--- a/doc/xv6_threading_presentation.pptx
+++ b/doc/xv6_threading_presentation.pptx
@@ -5,13 +5,13 @@
     <p:sldMasterId id="2147483648" r:id="rId1"/>
   </p:sldMasterIdLst>
   <p:sldIdLst>
-    <p:sldId id="256" r:id="rId7"/>
-    <p:sldId id="257" r:id="rId8"/>
-    <p:sldId id="258" r:id="rId9"/>
-    <p:sldId id="259" r:id="rId10"/>
-    <p:sldId id="260" r:id="rId11"/>
-    <p:sldId id="261" r:id="rId12"/>
-    <p:sldId id="262" r:id="rId13"/>
+    <p:sldId id="256" r:id="rId2"/>
+    <p:sldId id="257" r:id="rId3"/>
+    <p:sldId id="258" r:id="rId4"/>
+    <p:sldId id="259" r:id="rId5"/>
+    <p:sldId id="260" r:id="rId6"/>
+    <p:sldId id="261" r:id="rId7"/>
+    <p:sldId id="262" r:id="rId8"/>
   </p:sldIdLst>
   <p:sldSz cx="9144000" cy="6858000" type="screen4x3"/>
   <p:notesSz cx="6858000" cy="9144000"/>
@@ -110,6 +110,22 @@
       </a:defRPr>
     </a:lvl9pPr>
   </p:defaultTextStyle>
+  <p:extLst>
+    <p:ext uri="{EFAFB233-063F-42B5-8137-9DF3F51BA10A}">
+      <p15:sldGuideLst xmlns:p15="http://schemas.microsoft.com/office/powerpoint/2012/main">
+        <p15:guide id="1" orient="horz" pos="2160">
+          <p15:clr>
+            <a:srgbClr val="A4A3A4"/>
+          </p15:clr>
+        </p15:guide>
+        <p15:guide id="2" pos="2880">
+          <p15:clr>
+            <a:srgbClr val="A4A3A4"/>
+          </p15:clr>
+        </p15:guide>
+      </p15:sldGuideLst>
+    </p:ext>
+  </p:extLst>
 </p:presentation>
 </file>
 
@@ -151,10 +167,9 @@
           <a:lstStyle/>
           <a:p>
             <a:r>
-              <a:rPr lang="en-US" smtClean="0"/>
+              <a:rPr lang="en-US"/>
               <a:t>Click to edit Master title style</a:t>
             </a:r>
-            <a:endParaRPr lang="en-US"/>
           </a:p>
         </p:txBody>
       </p:sp>
@@ -270,10 +285,9 @@
           </a:lstStyle>
           <a:p>
             <a:r>
-              <a:rPr lang="en-US" smtClean="0"/>
+              <a:rPr lang="en-US"/>
               <a:t>Click to edit Master subtitle style</a:t>
             </a:r>
-            <a:endParaRPr lang="en-US"/>
           </a:p>
         </p:txBody>
       </p:sp>
@@ -294,7 +308,7 @@
           <a:p>
             <a:fld id="{5BCAD085-E8A6-8845-BD4E-CB4CCA059FC4}" type="datetimeFigureOut">
               <a:rPr lang="en-US" smtClean="0"/>
-              <a:t>1/27/13</a:t>
+              <a:t>5/22/2025</a:t>
             </a:fld>
             <a:endParaRPr lang="en-US"/>
           </a:p>
@@ -388,10 +402,9 @@
           <a:lstStyle/>
           <a:p>
             <a:r>
-              <a:rPr lang="en-US" smtClean="0"/>
+              <a:rPr lang="en-US"/>
               <a:t>Click to edit Master title style</a:t>
             </a:r>
-            <a:endParaRPr lang="en-US"/>
           </a:p>
         </p:txBody>
       </p:sp>
@@ -412,38 +425,37 @@
           <a:p>
             <a:pPr lvl="0"/>
             <a:r>
-              <a:rPr lang="en-US" smtClean="0"/>
+              <a:rPr lang="en-US"/>
               <a:t>Click to edit Master text styles</a:t>
             </a:r>
           </a:p>
           <a:p>
             <a:pPr lvl="1"/>
             <a:r>
-              <a:rPr lang="en-US" smtClean="0"/>
+              <a:rPr lang="en-US"/>
               <a:t>Second level</a:t>
             </a:r>
           </a:p>
           <a:p>
             <a:pPr lvl="2"/>
             <a:r>
-              <a:rPr lang="en-US" smtClean="0"/>
+              <a:rPr lang="en-US"/>
               <a:t>Third level</a:t>
             </a:r>
           </a:p>
           <a:p>
             <a:pPr lvl="3"/>
             <a:r>
-              <a:rPr lang="en-US" smtClean="0"/>
+              <a:rPr lang="en-US"/>
               <a:t>Fourth level</a:t>
             </a:r>
           </a:p>
           <a:p>
             <a:pPr lvl="4"/>
             <a:r>
-              <a:rPr lang="en-US" smtClean="0"/>
+              <a:rPr lang="en-US"/>
               <a:t>Fifth level</a:t>
             </a:r>
-            <a:endParaRPr lang="en-US"/>
           </a:p>
         </p:txBody>
       </p:sp>
@@ -464,7 +476,7 @@
           <a:p>
             <a:fld id="{5BCAD085-E8A6-8845-BD4E-CB4CCA059FC4}" type="datetimeFigureOut">
               <a:rPr lang="en-US" smtClean="0"/>
-              <a:t>1/27/13</a:t>
+              <a:t>5/22/2025</a:t>
             </a:fld>
             <a:endParaRPr lang="en-US"/>
           </a:p>
@@ -563,10 +575,9 @@
           <a:lstStyle/>
           <a:p>
             <a:r>
-              <a:rPr lang="en-US" smtClean="0"/>
+              <a:rPr lang="en-US"/>
               <a:t>Click to edit Master title style</a:t>
             </a:r>
-            <a:endParaRPr lang="en-US"/>
           </a:p>
         </p:txBody>
       </p:sp>
@@ -592,38 +603,37 @@
           <a:p>
             <a:pPr lvl="0"/>
             <a:r>
-              <a:rPr lang="en-US" smtClean="0"/>
+              <a:rPr lang="en-US"/>
               <a:t>Click to edit Master text styles</a:t>
             </a:r>
           </a:p>
           <a:p>
             <a:pPr lvl="1"/>
             <a:r>
-              <a:rPr lang="en-US" smtClean="0"/>
+              <a:rPr lang="en-US"/>
               <a:t>Second level</a:t>
             </a:r>
           </a:p>
           <a:p>
             <a:pPr lvl="2"/>
             <a:r>
-              <a:rPr lang="en-US" smtClean="0"/>
+              <a:rPr lang="en-US"/>
               <a:t>Third level</a:t>
             </a:r>
           </a:p>
           <a:p>
             <a:pPr lvl="3"/>
             <a:r>
-              <a:rPr lang="en-US" smtClean="0"/>
+              <a:rPr lang="en-US"/>
               <a:t>Fourth level</a:t>
             </a:r>
           </a:p>
           <a:p>
             <a:pPr lvl="4"/>
             <a:r>
-              <a:rPr lang="en-US" smtClean="0"/>
+              <a:rPr lang="en-US"/>
               <a:t>Fifth level</a:t>
             </a:r>
-            <a:endParaRPr lang="en-US"/>
           </a:p>
         </p:txBody>
       </p:sp>
@@ -644,7 +654,7 @@
           <a:p>
             <a:fld id="{5BCAD085-E8A6-8845-BD4E-CB4CCA059FC4}" type="datetimeFigureOut">
               <a:rPr lang="en-US" smtClean="0"/>
-              <a:t>1/27/13</a:t>
+              <a:t>5/22/2025</a:t>
             </a:fld>
             <a:endParaRPr lang="en-US"/>
           </a:p>
@@ -738,10 +748,9 @@
           <a:lstStyle/>
           <a:p>
             <a:r>
-              <a:rPr lang="en-US" smtClean="0"/>
+              <a:rPr lang="en-US"/>
               <a:t>Click to edit Master title style</a:t>
             </a:r>
-            <a:endParaRPr lang="en-US"/>
           </a:p>
         </p:txBody>
       </p:sp>
@@ -762,38 +771,37 @@
           <a:p>
             <a:pPr lvl="0"/>
             <a:r>
-              <a:rPr lang="en-US" smtClean="0"/>
+              <a:rPr lang="en-US"/>
               <a:t>Click to edit Master text styles</a:t>
             </a:r>
           </a:p>
           <a:p>
             <a:pPr lvl="1"/>
             <a:r>
-              <a:rPr lang="en-US" smtClean="0"/>
+              <a:rPr lang="en-US"/>
               <a:t>Second level</a:t>
             </a:r>
           </a:p>
           <a:p>
             <a:pPr lvl="2"/>
             <a:r>
-              <a:rPr lang="en-US" smtClean="0"/>
+              <a:rPr lang="en-US"/>
               <a:t>Third level</a:t>
             </a:r>
           </a:p>
           <a:p>
             <a:pPr lvl="3"/>
             <a:r>
-              <a:rPr lang="en-US" smtClean="0"/>
+              <a:rPr lang="en-US"/>
               <a:t>Fourth level</a:t>
             </a:r>
           </a:p>
           <a:p>
             <a:pPr lvl="4"/>
             <a:r>
-              <a:rPr lang="en-US" smtClean="0"/>
+              <a:rPr lang="en-US"/>
               <a:t>Fifth level</a:t>
             </a:r>
-            <a:endParaRPr lang="en-US"/>
           </a:p>
         </p:txBody>
       </p:sp>
@@ -814,7 +822,7 @@
           <a:p>
             <a:fld id="{5BCAD085-E8A6-8845-BD4E-CB4CCA059FC4}" type="datetimeFigureOut">
               <a:rPr lang="en-US" smtClean="0"/>
-              <a:t>1/27/13</a:t>
+              <a:t>5/22/2025</a:t>
             </a:fld>
             <a:endParaRPr lang="en-US"/>
           </a:p>
@@ -917,10 +925,9 @@
           </a:lstStyle>
           <a:p>
             <a:r>
-              <a:rPr lang="en-US" smtClean="0"/>
+              <a:rPr lang="en-US"/>
               <a:t>Click to edit Master title style</a:t>
             </a:r>
-            <a:endParaRPr lang="en-US"/>
           </a:p>
         </p:txBody>
       </p:sp>
@@ -1037,7 +1044,7 @@
           <a:p>
             <a:pPr lvl="0"/>
             <a:r>
-              <a:rPr lang="en-US" smtClean="0"/>
+              <a:rPr lang="en-US"/>
               <a:t>Click to edit Master text styles</a:t>
             </a:r>
           </a:p>
@@ -1060,7 +1067,7 @@
           <a:p>
             <a:fld id="{5BCAD085-E8A6-8845-BD4E-CB4CCA059FC4}" type="datetimeFigureOut">
               <a:rPr lang="en-US" smtClean="0"/>
-              <a:t>1/27/13</a:t>
+              <a:t>5/22/2025</a:t>
             </a:fld>
             <a:endParaRPr lang="en-US"/>
           </a:p>
@@ -1154,10 +1161,9 @@
           <a:lstStyle/>
           <a:p>
             <a:r>
-              <a:rPr lang="en-US" smtClean="0"/>
+              <a:rPr lang="en-US"/>
               <a:t>Click to edit Master title style</a:t>
             </a:r>
-            <a:endParaRPr lang="en-US"/>
           </a:p>
         </p:txBody>
       </p:sp>
@@ -1211,38 +1217,37 @@
           <a:p>
             <a:pPr lvl="0"/>
             <a:r>
-              <a:rPr lang="en-US" smtClean="0"/>
+              <a:rPr lang="en-US"/>
               <a:t>Click to edit Master text styles</a:t>
             </a:r>
           </a:p>
           <a:p>
             <a:pPr lvl="1"/>
             <a:r>
-              <a:rPr lang="en-US" smtClean="0"/>
+              <a:rPr lang="en-US"/>
               <a:t>Second level</a:t>
             </a:r>
           </a:p>
           <a:p>
             <a:pPr lvl="2"/>
             <a:r>
-              <a:rPr lang="en-US" smtClean="0"/>
+              <a:rPr lang="en-US"/>
               <a:t>Third level</a:t>
             </a:r>
           </a:p>
           <a:p>
             <a:pPr lvl="3"/>
             <a:r>
-              <a:rPr lang="en-US" smtClean="0"/>
+              <a:rPr lang="en-US"/>
               <a:t>Fourth level</a:t>
             </a:r>
           </a:p>
           <a:p>
             <a:pPr lvl="4"/>
             <a:r>
-              <a:rPr lang="en-US" smtClean="0"/>
+              <a:rPr lang="en-US"/>
               <a:t>Fifth level</a:t>
             </a:r>
-            <a:endParaRPr lang="en-US"/>
           </a:p>
         </p:txBody>
       </p:sp>
@@ -1296,38 +1301,37 @@
           <a:p>
             <a:pPr lvl="0"/>
             <a:r>
-              <a:rPr lang="en-US" smtClean="0"/>
+              <a:rPr lang="en-US"/>
               <a:t>Click to edit Master text styles</a:t>
             </a:r>
           </a:p>
           <a:p>
             <a:pPr lvl="1"/>
             <a:r>
-              <a:rPr lang="en-US" smtClean="0"/>
+              <a:rPr lang="en-US"/>
               <a:t>Second level</a:t>
             </a:r>
           </a:p>
           <a:p>
             <a:pPr lvl="2"/>
             <a:r>
-              <a:rPr lang="en-US" smtClean="0"/>
+              <a:rPr lang="en-US"/>
               <a:t>Third level</a:t>
             </a:r>
           </a:p>
           <a:p>
             <a:pPr lvl="3"/>
             <a:r>
-              <a:rPr lang="en-US" smtClean="0"/>
+              <a:rPr lang="en-US"/>
               <a:t>Fourth level</a:t>
             </a:r>
           </a:p>
           <a:p>
             <a:pPr lvl="4"/>
             <a:r>
-              <a:rPr lang="en-US" smtClean="0"/>
+              <a:rPr lang="en-US"/>
               <a:t>Fifth level</a:t>
             </a:r>
-            <a:endParaRPr lang="en-US"/>
           </a:p>
         </p:txBody>
       </p:sp>
@@ -1348,7 +1352,7 @@
           <a:p>
             <a:fld id="{5BCAD085-E8A6-8845-BD4E-CB4CCA059FC4}" type="datetimeFigureOut">
               <a:rPr lang="en-US" smtClean="0"/>
-              <a:t>1/27/13</a:t>
+              <a:t>5/22/2025</a:t>
             </a:fld>
             <a:endParaRPr lang="en-US"/>
           </a:p>
@@ -1446,10 +1450,9 @@
           </a:lstStyle>
           <a:p>
             <a:r>
-              <a:rPr lang="en-US" smtClean="0"/>
+              <a:rPr lang="en-US"/>
               <a:t>Click to edit Master title style</a:t>
             </a:r>
-            <a:endParaRPr lang="en-US"/>
           </a:p>
         </p:txBody>
       </p:sp>
@@ -1512,7 +1515,7 @@
           <a:p>
             <a:pPr lvl="0"/>
             <a:r>
-              <a:rPr lang="en-US" smtClean="0"/>
+              <a:rPr lang="en-US"/>
               <a:t>Click to edit Master text styles</a:t>
             </a:r>
           </a:p>
@@ -1568,38 +1571,37 @@
           <a:p>
             <a:pPr lvl="0"/>
             <a:r>
-              <a:rPr lang="en-US" smtClean="0"/>
+              <a:rPr lang="en-US"/>
               <a:t>Click to edit Master text styles</a:t>
             </a:r>
           </a:p>
           <a:p>
             <a:pPr lvl="1"/>
             <a:r>
-              <a:rPr lang="en-US" smtClean="0"/>
+              <a:rPr lang="en-US"/>
               <a:t>Second level</a:t>
             </a:r>
           </a:p>
           <a:p>
             <a:pPr lvl="2"/>
             <a:r>
-              <a:rPr lang="en-US" smtClean="0"/>
+              <a:rPr lang="en-US"/>
               <a:t>Third level</a:t>
             </a:r>
           </a:p>
           <a:p>
             <a:pPr lvl="3"/>
             <a:r>
-              <a:rPr lang="en-US" smtClean="0"/>
+              <a:rPr lang="en-US"/>
               <a:t>Fourth level</a:t>
             </a:r>
           </a:p>
           <a:p>
             <a:pPr lvl="4"/>
             <a:r>
-              <a:rPr lang="en-US" smtClean="0"/>
+              <a:rPr lang="en-US"/>
               <a:t>Fifth level</a:t>
             </a:r>
-            <a:endParaRPr lang="en-US"/>
           </a:p>
         </p:txBody>
       </p:sp>
@@ -1662,7 +1664,7 @@
           <a:p>
             <a:pPr lvl="0"/>
             <a:r>
-              <a:rPr lang="en-US" smtClean="0"/>
+              <a:rPr lang="en-US"/>
               <a:t>Click to edit Master text styles</a:t>
             </a:r>
           </a:p>
@@ -1718,38 +1720,37 @@
           <a:p>
             <a:pPr lvl="0"/>
             <a:r>
-              <a:rPr lang="en-US" smtClean="0"/>
+              <a:rPr lang="en-US"/>
               <a:t>Click to edit Master text styles</a:t>
             </a:r>
           </a:p>
           <a:p>
             <a:pPr lvl="1"/>
             <a:r>
-              <a:rPr lang="en-US" smtClean="0"/>
+              <a:rPr lang="en-US"/>
               <a:t>Second level</a:t>
             </a:r>
           </a:p>
           <a:p>
             <a:pPr lvl="2"/>
             <a:r>
-              <a:rPr lang="en-US" smtClean="0"/>
+              <a:rPr lang="en-US"/>
               <a:t>Third level</a:t>
             </a:r>
           </a:p>
           <a:p>
             <a:pPr lvl="3"/>
             <a:r>
-              <a:rPr lang="en-US" smtClean="0"/>
+              <a:rPr lang="en-US"/>
               <a:t>Fourth level</a:t>
             </a:r>
           </a:p>
           <a:p>
             <a:pPr lvl="4"/>
             <a:r>
-              <a:rPr lang="en-US" smtClean="0"/>
+              <a:rPr lang="en-US"/>
               <a:t>Fifth level</a:t>
             </a:r>
-            <a:endParaRPr lang="en-US"/>
           </a:p>
         </p:txBody>
       </p:sp>
@@ -1770,7 +1771,7 @@
           <a:p>
             <a:fld id="{5BCAD085-E8A6-8845-BD4E-CB4CCA059FC4}" type="datetimeFigureOut">
               <a:rPr lang="en-US" smtClean="0"/>
-              <a:t>1/27/13</a:t>
+              <a:t>5/22/2025</a:t>
             </a:fld>
             <a:endParaRPr lang="en-US"/>
           </a:p>
@@ -1864,10 +1865,9 @@
           <a:lstStyle/>
           <a:p>
             <a:r>
-              <a:rPr lang="en-US" smtClean="0"/>
+              <a:rPr lang="en-US"/>
               <a:t>Click to edit Master title style</a:t>
             </a:r>
-            <a:endParaRPr lang="en-US"/>
           </a:p>
         </p:txBody>
       </p:sp>
@@ -1888,7 +1888,7 @@
           <a:p>
             <a:fld id="{5BCAD085-E8A6-8845-BD4E-CB4CCA059FC4}" type="datetimeFigureOut">
               <a:rPr lang="en-US" smtClean="0"/>
-              <a:t>1/27/13</a:t>
+              <a:t>5/22/2025</a:t>
             </a:fld>
             <a:endParaRPr lang="en-US"/>
           </a:p>
@@ -1983,7 +1983,7 @@
           <a:p>
             <a:fld id="{5BCAD085-E8A6-8845-BD4E-CB4CCA059FC4}" type="datetimeFigureOut">
               <a:rPr lang="en-US" smtClean="0"/>
-              <a:t>1/27/13</a:t>
+              <a:t>5/22/2025</a:t>
             </a:fld>
             <a:endParaRPr lang="en-US"/>
           </a:p>
@@ -2086,10 +2086,9 @@
           </a:lstStyle>
           <a:p>
             <a:r>
-              <a:rPr lang="en-US" smtClean="0"/>
+              <a:rPr lang="en-US"/>
               <a:t>Click to edit Master title style</a:t>
             </a:r>
-            <a:endParaRPr lang="en-US"/>
           </a:p>
         </p:txBody>
       </p:sp>
@@ -2143,38 +2142,37 @@
           <a:p>
             <a:pPr lvl="0"/>
             <a:r>
-              <a:rPr lang="en-US" smtClean="0"/>
+              <a:rPr lang="en-US"/>
               <a:t>Click to edit Master text styles</a:t>
             </a:r>
           </a:p>
           <a:p>
             <a:pPr lvl="1"/>
             <a:r>
-              <a:rPr lang="en-US" smtClean="0"/>
+              <a:rPr lang="en-US"/>
               <a:t>Second level</a:t>
             </a:r>
           </a:p>
           <a:p>
             <a:pPr lvl="2"/>
             <a:r>
-              <a:rPr lang="en-US" smtClean="0"/>
+              <a:rPr lang="en-US"/>
               <a:t>Third level</a:t>
             </a:r>
           </a:p>
           <a:p>
             <a:pPr lvl="3"/>
             <a:r>
-              <a:rPr lang="en-US" smtClean="0"/>
+              <a:rPr lang="en-US"/>
               <a:t>Fourth level</a:t>
             </a:r>
           </a:p>
           <a:p>
             <a:pPr lvl="4"/>
             <a:r>
-              <a:rPr lang="en-US" smtClean="0"/>
+              <a:rPr lang="en-US"/>
               <a:t>Fifth level</a:t>
             </a:r>
-            <a:endParaRPr lang="en-US"/>
           </a:p>
         </p:txBody>
       </p:sp>
@@ -2237,7 +2235,7 @@
           <a:p>
             <a:pPr lvl="0"/>
             <a:r>
-              <a:rPr lang="en-US" smtClean="0"/>
+              <a:rPr lang="en-US"/>
               <a:t>Click to edit Master text styles</a:t>
             </a:r>
           </a:p>
@@ -2260,7 +2258,7 @@
           <a:p>
             <a:fld id="{5BCAD085-E8A6-8845-BD4E-CB4CCA059FC4}" type="datetimeFigureOut">
               <a:rPr lang="en-US" smtClean="0"/>
-              <a:t>1/27/13</a:t>
+              <a:t>5/22/2025</a:t>
             </a:fld>
             <a:endParaRPr lang="en-US"/>
           </a:p>
@@ -2363,10 +2361,9 @@
           </a:lstStyle>
           <a:p>
             <a:r>
-              <a:rPr lang="en-US" smtClean="0"/>
+              <a:rPr lang="en-US"/>
               <a:t>Click to edit Master title style</a:t>
             </a:r>
-            <a:endParaRPr lang="en-US"/>
           </a:p>
         </p:txBody>
       </p:sp>
@@ -2490,7 +2487,7 @@
           <a:p>
             <a:pPr lvl="0"/>
             <a:r>
-              <a:rPr lang="en-US" smtClean="0"/>
+              <a:rPr lang="en-US"/>
               <a:t>Click to edit Master text styles</a:t>
             </a:r>
           </a:p>
@@ -2513,7 +2510,7 @@
           <a:p>
             <a:fld id="{5BCAD085-E8A6-8845-BD4E-CB4CCA059FC4}" type="datetimeFigureOut">
               <a:rPr lang="en-US" smtClean="0"/>
-              <a:t>1/27/13</a:t>
+              <a:t>5/22/2025</a:t>
             </a:fld>
             <a:endParaRPr lang="en-US"/>
           </a:p>
@@ -2622,10 +2619,9 @@
           <a:lstStyle/>
           <a:p>
             <a:r>
-              <a:rPr lang="en-US" smtClean="0"/>
+              <a:rPr lang="en-US"/>
               <a:t>Click to edit Master title style</a:t>
             </a:r>
-            <a:endParaRPr lang="en-US"/>
           </a:p>
         </p:txBody>
       </p:sp>
@@ -2656,38 +2652,37 @@
           <a:p>
             <a:pPr lvl="0"/>
             <a:r>
-              <a:rPr lang="en-US" smtClean="0"/>
+              <a:rPr lang="en-US"/>
               <a:t>Click to edit Master text styles</a:t>
             </a:r>
           </a:p>
           <a:p>
             <a:pPr lvl="1"/>
             <a:r>
-              <a:rPr lang="en-US" smtClean="0"/>
+              <a:rPr lang="en-US"/>
               <a:t>Second level</a:t>
             </a:r>
           </a:p>
           <a:p>
             <a:pPr lvl="2"/>
             <a:r>
-              <a:rPr lang="en-US" smtClean="0"/>
+              <a:rPr lang="en-US"/>
               <a:t>Third level</a:t>
             </a:r>
           </a:p>
           <a:p>
             <a:pPr lvl="3"/>
             <a:r>
-              <a:rPr lang="en-US" smtClean="0"/>
+              <a:rPr lang="en-US"/>
               <a:t>Fourth level</a:t>
             </a:r>
           </a:p>
           <a:p>
             <a:pPr lvl="4"/>
             <a:r>
-              <a:rPr lang="en-US" smtClean="0"/>
+              <a:rPr lang="en-US"/>
               <a:t>Fifth level</a:t>
             </a:r>
-            <a:endParaRPr lang="en-US"/>
           </a:p>
         </p:txBody>
       </p:sp>
@@ -2726,7 +2721,7 @@
           <a:p>
             <a:fld id="{5BCAD085-E8A6-8845-BD4E-CB4CCA059FC4}" type="datetimeFigureOut">
               <a:rPr lang="en-US" smtClean="0"/>
-              <a:t>1/27/13</a:t>
+              <a:t>5/22/2025</a:t>
             </a:fld>
             <a:endParaRPr lang="en-US"/>
           </a:p>
@@ -3085,7 +3080,7 @@
 </file>
 
 <file path=ppt/slides/slide1.xml><?xml version="1.0" encoding="utf-8"?>
-<p:sld xmlns:a="http://schemas.openxmlformats.org/drawingml/2006/main" xmlns:p="http://schemas.openxmlformats.org/presentationml/2006/main" xmlns:r="http://schemas.openxmlformats.org/officeDocument/2006/relationships">
+<p:sld xmlns:a="http://schemas.openxmlformats.org/drawingml/2006/main" xmlns:r="http://schemas.openxmlformats.org/officeDocument/2006/relationships" xmlns:p="http://schemas.openxmlformats.org/presentationml/2006/main">
   <p:cSld>
     <p:spTree>
       <p:nvGrpSpPr>
@@ -3093,7 +3088,14 @@
         <p:cNvGrpSpPr/>
         <p:nvPr/>
       </p:nvGrpSpPr>
-      <p:grpSpPr/>
+      <p:grpSpPr>
+        <a:xfrm>
+          <a:off x="0" y="0"/>
+          <a:ext cx="0" cy="0"/>
+          <a:chOff x="0" y="0"/>
+          <a:chExt cx="0" cy="0"/>
+        </a:xfrm>
+      </p:grpSpPr>
       <p:sp>
         <p:nvSpPr>
           <p:cNvPr id="2" name="Title 1"/>
@@ -3150,7 +3152,7 @@
 </file>
 
 <file path=ppt/slides/slide2.xml><?xml version="1.0" encoding="utf-8"?>
-<p:sld xmlns:a="http://schemas.openxmlformats.org/drawingml/2006/main" xmlns:p="http://schemas.openxmlformats.org/presentationml/2006/main" xmlns:r="http://schemas.openxmlformats.org/officeDocument/2006/relationships">
+<p:sld xmlns:a="http://schemas.openxmlformats.org/drawingml/2006/main" xmlns:r="http://schemas.openxmlformats.org/officeDocument/2006/relationships" xmlns:p="http://schemas.openxmlformats.org/presentationml/2006/main">
   <p:cSld>
     <p:spTree>
       <p:nvGrpSpPr>
@@ -3158,7 +3160,14 @@
         <p:cNvGrpSpPr/>
         <p:nvPr/>
       </p:nvGrpSpPr>
-      <p:grpSpPr/>
+      <p:grpSpPr>
+        <a:xfrm>
+          <a:off x="0" y="0"/>
+          <a:ext cx="0" cy="0"/>
+          <a:chOff x="0" y="0"/>
+          <a:chExt cx="0" cy="0"/>
+        </a:xfrm>
+      </p:grpSpPr>
       <p:sp>
         <p:nvSpPr>
           <p:cNvPr id="2" name="Title 1"/>
@@ -3225,7 +3234,7 @@
 </file>
 
 <file path=ppt/slides/slide3.xml><?xml version="1.0" encoding="utf-8"?>
-<p:sld xmlns:a="http://schemas.openxmlformats.org/drawingml/2006/main" xmlns:p="http://schemas.openxmlformats.org/presentationml/2006/main" xmlns:r="http://schemas.openxmlformats.org/officeDocument/2006/relationships">
+<p:sld xmlns:a="http://schemas.openxmlformats.org/drawingml/2006/main" xmlns:r="http://schemas.openxmlformats.org/officeDocument/2006/relationships" xmlns:p="http://schemas.openxmlformats.org/presentationml/2006/main">
   <p:cSld>
     <p:spTree>
       <p:nvGrpSpPr>
@@ -3233,7 +3242,14 @@
         <p:cNvGrpSpPr/>
         <p:nvPr/>
       </p:nvGrpSpPr>
-      <p:grpSpPr/>
+      <p:grpSpPr>
+        <a:xfrm>
+          <a:off x="0" y="0"/>
+          <a:ext cx="0" cy="0"/>
+          <a:chOff x="0" y="0"/>
+          <a:chExt cx="0" cy="0"/>
+        </a:xfrm>
+      </p:grpSpPr>
       <p:sp>
         <p:nvSpPr>
           <p:cNvPr id="2" name="Title 1"/>
@@ -3300,7 +3316,7 @@
 </file>
 
 <file path=ppt/slides/slide4.xml><?xml version="1.0" encoding="utf-8"?>
-<p:sld xmlns:a="http://schemas.openxmlformats.org/drawingml/2006/main" xmlns:p="http://schemas.openxmlformats.org/presentationml/2006/main" xmlns:r="http://schemas.openxmlformats.org/officeDocument/2006/relationships">
+<p:sld xmlns:a="http://schemas.openxmlformats.org/drawingml/2006/main" xmlns:r="http://schemas.openxmlformats.org/officeDocument/2006/relationships" xmlns:p="http://schemas.openxmlformats.org/presentationml/2006/main">
   <p:cSld>
     <p:spTree>
       <p:nvGrpSpPr>
@@ -3308,7 +3324,14 @@
         <p:cNvGrpSpPr/>
         <p:nvPr/>
       </p:nvGrpSpPr>
-      <p:grpSpPr/>
+      <p:grpSpPr>
+        <a:xfrm>
+          <a:off x="0" y="0"/>
+          <a:ext cx="0" cy="0"/>
+          <a:chOff x="0" y="0"/>
+          <a:chExt cx="0" cy="0"/>
+        </a:xfrm>
+      </p:grpSpPr>
       <p:sp>
         <p:nvSpPr>
           <p:cNvPr id="2" name="Title 1"/>
@@ -3370,7 +3393,7 @@
 </file>
 
 <file path=ppt/slides/slide5.xml><?xml version="1.0" encoding="utf-8"?>
-<p:sld xmlns:a="http://schemas.openxmlformats.org/drawingml/2006/main" xmlns:p="http://schemas.openxmlformats.org/presentationml/2006/main" xmlns:r="http://schemas.openxmlformats.org/officeDocument/2006/relationships">
+<p:sld xmlns:a="http://schemas.openxmlformats.org/drawingml/2006/main" xmlns:r="http://schemas.openxmlformats.org/officeDocument/2006/relationships" xmlns:p="http://schemas.openxmlformats.org/presentationml/2006/main">
   <p:cSld>
     <p:spTree>
       <p:nvGrpSpPr>
@@ -3378,7 +3401,14 @@
         <p:cNvGrpSpPr/>
         <p:nvPr/>
       </p:nvGrpSpPr>
-      <p:grpSpPr/>
+      <p:grpSpPr>
+        <a:xfrm>
+          <a:off x="0" y="0"/>
+          <a:ext cx="0" cy="0"/>
+          <a:chOff x="0" y="0"/>
+          <a:chExt cx="0" cy="0"/>
+        </a:xfrm>
+      </p:grpSpPr>
       <p:sp>
         <p:nvSpPr>
           <p:cNvPr id="2" name="Title 1"/>
@@ -3416,18 +3446,47 @@
           <a:lstStyle/>
           <a:p>
             <a:r>
-              <a:t>Threads share memory via the same pagetable.</a:t>
-            </a:r>
-          </a:p>
-          <a:p>
-            <a:r>
-              <a:t>growproc() updates sz for all threads with the same pagetable.</a:t>
-            </a:r>
-          </a:p>
-          <a:p>
-            <a:r>
-              <a:t>Shared buffers allocated with malloc/sbrk are visible to all threads.</a:t>
-            </a:r>
+              <a:rPr dirty="0"/>
+              <a:t>Threads share memory via the same </a:t>
+            </a:r>
+            <a:r>
+              <a:rPr dirty="0" err="1"/>
+              <a:t>pagetable</a:t>
+            </a:r>
+            <a:r>
+              <a:rPr dirty="0"/>
+              <a:t>.</a:t>
+            </a:r>
+          </a:p>
+          <a:p>
+            <a:r>
+              <a:rPr dirty="0"/>
+              <a:t>Shared buffers allocated with malloc/</a:t>
+            </a:r>
+            <a:r>
+              <a:rPr dirty="0" err="1"/>
+              <a:t>sbrk</a:t>
+            </a:r>
+            <a:r>
+              <a:rPr dirty="0"/>
+              <a:t> are visible to all threads.</a:t>
+            </a:r>
+            <a:endParaRPr lang="en-US" dirty="0"/>
+          </a:p>
+          <a:p>
+            <a:r>
+              <a:rPr lang="en-US" dirty="0"/>
+              <a:t>Helper function to share </a:t>
+            </a:r>
+            <a:r>
+              <a:rPr lang="en-US" dirty="0" err="1"/>
+              <a:t>pagetable</a:t>
+            </a:r>
+            <a:r>
+              <a:rPr lang="en-US" dirty="0"/>
+              <a:t> from parent to child</a:t>
+            </a:r>
+            <a:endParaRPr dirty="0"/>
           </a:p>
         </p:txBody>
       </p:sp>
@@ -3440,7 +3499,7 @@
 </file>
 
 <file path=ppt/slides/slide6.xml><?xml version="1.0" encoding="utf-8"?>
-<p:sld xmlns:a="http://schemas.openxmlformats.org/drawingml/2006/main" xmlns:p="http://schemas.openxmlformats.org/presentationml/2006/main" xmlns:r="http://schemas.openxmlformats.org/officeDocument/2006/relationships">
+<p:sld xmlns:a="http://schemas.openxmlformats.org/drawingml/2006/main" xmlns:r="http://schemas.openxmlformats.org/officeDocument/2006/relationships" xmlns:p="http://schemas.openxmlformats.org/presentationml/2006/main">
   <p:cSld>
     <p:spTree>
       <p:nvGrpSpPr>
@@ -3448,7 +3507,14 @@
         <p:cNvGrpSpPr/>
         <p:nvPr/>
       </p:nvGrpSpPr>
-      <p:grpSpPr/>
+      <p:grpSpPr>
+        <a:xfrm>
+          <a:off x="0" y="0"/>
+          <a:ext cx="0" cy="0"/>
+          <a:chOff x="0" y="0"/>
+          <a:chExt cx="0" cy="0"/>
+        </a:xfrm>
+      </p:grpSpPr>
       <p:sp>
         <p:nvSpPr>
           <p:cNvPr id="2" name="Title 1"/>
@@ -3510,7 +3576,7 @@
 </file>
 
 <file path=ppt/slides/slide7.xml><?xml version="1.0" encoding="utf-8"?>
-<p:sld xmlns:a="http://schemas.openxmlformats.org/drawingml/2006/main" xmlns:p="http://schemas.openxmlformats.org/presentationml/2006/main" xmlns:r="http://schemas.openxmlformats.org/officeDocument/2006/relationships">
+<p:sld xmlns:a="http://schemas.openxmlformats.org/drawingml/2006/main" xmlns:r="http://schemas.openxmlformats.org/officeDocument/2006/relationships" xmlns:p="http://schemas.openxmlformats.org/presentationml/2006/main">
   <p:cSld>
     <p:spTree>
       <p:nvGrpSpPr>
@@ -3518,7 +3584,14 @@
         <p:cNvGrpSpPr/>
         <p:nvPr/>
       </p:nvGrpSpPr>
-      <p:grpSpPr/>
+      <p:grpSpPr>
+        <a:xfrm>
+          <a:off x="0" y="0"/>
+          <a:ext cx="0" cy="0"/>
+          <a:chOff x="0" y="0"/>
+          <a:chExt cx="0" cy="0"/>
+        </a:xfrm>
+      </p:grpSpPr>
       <p:sp>
         <p:nvSpPr>
           <p:cNvPr id="2" name="Title 1"/>
@@ -3556,17 +3629,30 @@
           <a:lstStyle/>
           <a:p>
             <a:r>
-              <a:t>Start with shared pagetable design earlier.</a:t>
-            </a:r>
-          </a:p>
-          <a:p>
-            <a:r>
-              <a:t>Map thread stacks more explicitly using user-level sbrk().</a:t>
-            </a:r>
-          </a:p>
-          <a:p>
-            <a:r>
-              <a:t>Add more logging and trapframe validation to catch issues sooner.</a:t>
+              <a:rPr dirty="0"/>
+              <a:t>Start with shared </a:t>
+            </a:r>
+            <a:r>
+              <a:rPr dirty="0" err="1"/>
+              <a:t>pagetable</a:t>
+            </a:r>
+            <a:r>
+              <a:rPr dirty="0"/>
+              <a:t> design earlier.</a:t>
+            </a:r>
+          </a:p>
+          <a:p>
+            <a:r>
+              <a:rPr dirty="0"/>
+              <a:t>Add more logging and </a:t>
+            </a:r>
+            <a:r>
+              <a:rPr dirty="0" err="1"/>
+              <a:t>trapframe</a:t>
+            </a:r>
+            <a:r>
+              <a:rPr dirty="0"/>
+              <a:t> validation to catch issues sooner.</a:t>
             </a:r>
           </a:p>
         </p:txBody>
